--- a/assets/images/Experitments_Procedures.pptx
+++ b/assets/images/Experitments_Procedures.pptx
@@ -5,10 +5,17 @@
     <p:sldMasterId id="2147483684" r:id="rId4"/>
   </p:sldMasterIdLst>
   <p:notesMasterIdLst>
-    <p:notesMasterId r:id="rId6"/>
+    <p:notesMasterId r:id="rId13"/>
   </p:notesMasterIdLst>
   <p:sldIdLst>
     <p:sldId id="256" r:id="rId5"/>
+    <p:sldId id="257" r:id="rId6"/>
+    <p:sldId id="258" r:id="rId7"/>
+    <p:sldId id="259" r:id="rId8"/>
+    <p:sldId id="260" r:id="rId9"/>
+    <p:sldId id="261" r:id="rId10"/>
+    <p:sldId id="262" r:id="rId11"/>
+    <p:sldId id="263" r:id="rId12"/>
   </p:sldIdLst>
   <p:sldSz cx="21601113" cy="14400213"/>
   <p:notesSz cx="9144000" cy="6858000"/>
@@ -402,7 +409,7 @@
           <a:p>
             <a:fld id="{43466010-90F5-41E6-AAE8-7E580DBF8C7C}" type="datetimeFigureOut">
               <a:rPr lang="en-DK" smtClean="0"/>
-              <a:t>26/04/2026</a:t>
+              <a:t>27/04/2026</a:t>
             </a:fld>
             <a:endParaRPr lang="en-DK"/>
           </a:p>
@@ -716,7 +723,7 @@
           <a:p>
             <a:r>
               <a:rPr lang="en-GB" dirty="0"/>
-              <a:t>Joystick</a:t>
+              <a:t>Pulse</a:t>
             </a:r>
             <a:endParaRPr lang="en-DK" dirty="0"/>
           </a:p>
@@ -889,7 +896,7 @@
           <a:p>
             <a:fld id="{F1465E3F-0B9F-47C9-9E08-5C827E095B3E}" type="datetimeFigureOut">
               <a:rPr lang="en-DK" smtClean="0"/>
-              <a:t>26/04/2026</a:t>
+              <a:t>27/04/2026</a:t>
             </a:fld>
             <a:endParaRPr lang="en-DK"/>
           </a:p>
@@ -1059,7 +1066,7 @@
           <a:p>
             <a:fld id="{F1465E3F-0B9F-47C9-9E08-5C827E095B3E}" type="datetimeFigureOut">
               <a:rPr lang="en-DK" smtClean="0"/>
-              <a:t>26/04/2026</a:t>
+              <a:t>27/04/2026</a:t>
             </a:fld>
             <a:endParaRPr lang="en-DK"/>
           </a:p>
@@ -1239,7 +1246,7 @@
           <a:p>
             <a:fld id="{F1465E3F-0B9F-47C9-9E08-5C827E095B3E}" type="datetimeFigureOut">
               <a:rPr lang="en-DK" smtClean="0"/>
-              <a:t>26/04/2026</a:t>
+              <a:t>27/04/2026</a:t>
             </a:fld>
             <a:endParaRPr lang="en-DK"/>
           </a:p>
@@ -1409,7 +1416,7 @@
           <a:p>
             <a:fld id="{F1465E3F-0B9F-47C9-9E08-5C827E095B3E}" type="datetimeFigureOut">
               <a:rPr lang="en-DK" smtClean="0"/>
-              <a:t>26/04/2026</a:t>
+              <a:t>27/04/2026</a:t>
             </a:fld>
             <a:endParaRPr lang="en-DK"/>
           </a:p>
@@ -1655,7 +1662,7 @@
           <a:p>
             <a:fld id="{F1465E3F-0B9F-47C9-9E08-5C827E095B3E}" type="datetimeFigureOut">
               <a:rPr lang="en-DK" smtClean="0"/>
-              <a:t>26/04/2026</a:t>
+              <a:t>27/04/2026</a:t>
             </a:fld>
             <a:endParaRPr lang="en-DK"/>
           </a:p>
@@ -1887,7 +1894,7 @@
           <a:p>
             <a:fld id="{F1465E3F-0B9F-47C9-9E08-5C827E095B3E}" type="datetimeFigureOut">
               <a:rPr lang="en-DK" smtClean="0"/>
-              <a:t>26/04/2026</a:t>
+              <a:t>27/04/2026</a:t>
             </a:fld>
             <a:endParaRPr lang="en-DK"/>
           </a:p>
@@ -2254,7 +2261,7 @@
           <a:p>
             <a:fld id="{F1465E3F-0B9F-47C9-9E08-5C827E095B3E}" type="datetimeFigureOut">
               <a:rPr lang="en-DK" smtClean="0"/>
-              <a:t>26/04/2026</a:t>
+              <a:t>27/04/2026</a:t>
             </a:fld>
             <a:endParaRPr lang="en-DK"/>
           </a:p>
@@ -2372,7 +2379,7 @@
           <a:p>
             <a:fld id="{F1465E3F-0B9F-47C9-9E08-5C827E095B3E}" type="datetimeFigureOut">
               <a:rPr lang="en-DK" smtClean="0"/>
-              <a:t>26/04/2026</a:t>
+              <a:t>27/04/2026</a:t>
             </a:fld>
             <a:endParaRPr lang="en-DK"/>
           </a:p>
@@ -2467,7 +2474,7 @@
           <a:p>
             <a:fld id="{F1465E3F-0B9F-47C9-9E08-5C827E095B3E}" type="datetimeFigureOut">
               <a:rPr lang="en-DK" smtClean="0"/>
-              <a:t>26/04/2026</a:t>
+              <a:t>27/04/2026</a:t>
             </a:fld>
             <a:endParaRPr lang="en-DK"/>
           </a:p>
@@ -2744,7 +2751,7 @@
           <a:p>
             <a:fld id="{F1465E3F-0B9F-47C9-9E08-5C827E095B3E}" type="datetimeFigureOut">
               <a:rPr lang="en-DK" smtClean="0"/>
-              <a:t>26/04/2026</a:t>
+              <a:t>27/04/2026</a:t>
             </a:fld>
             <a:endParaRPr lang="en-DK"/>
           </a:p>
@@ -3001,7 +3008,7 @@
           <a:p>
             <a:fld id="{F1465E3F-0B9F-47C9-9E08-5C827E095B3E}" type="datetimeFigureOut">
               <a:rPr lang="en-DK" smtClean="0"/>
-              <a:t>26/04/2026</a:t>
+              <a:t>27/04/2026</a:t>
             </a:fld>
             <a:endParaRPr lang="en-DK"/>
           </a:p>
@@ -3214,7 +3221,7 @@
           <a:p>
             <a:fld id="{F1465E3F-0B9F-47C9-9E08-5C827E095B3E}" type="datetimeFigureOut">
               <a:rPr lang="en-DK" smtClean="0"/>
-              <a:t>26/04/2026</a:t>
+              <a:t>27/04/2026</a:t>
             </a:fld>
             <a:endParaRPr lang="en-DK"/>
           </a:p>
@@ -3619,10 +3626,460 @@
           <a:chExt cx="0" cy="0"/>
         </a:xfrm>
       </p:grpSpPr>
+      <p:pic>
+        <p:nvPicPr>
+          <p:cNvPr id="3" name="Picture 2" descr="The diagram shows a linear relationship between current (mA) and time (ms), indicating a constant increase in current over time.&#10;&#10;AI-generated content may be incorrect.">
+            <a:extLst>
+              <a:ext uri="{FF2B5EF4-FFF2-40B4-BE49-F238E27FC236}">
+                <a16:creationId xmlns:a16="http://schemas.microsoft.com/office/drawing/2014/main" id="{AB9273FB-1AEB-DC8B-FA62-ED4BECC62D10}"/>
+              </a:ext>
+            </a:extLst>
+          </p:cNvPr>
+          <p:cNvPicPr>
+            <a:picLocks noChangeAspect="1"/>
+          </p:cNvPicPr>
+          <p:nvPr/>
+        </p:nvPicPr>
+        <p:blipFill>
+          <a:blip r:embed="rId3"/>
+          <a:stretch>
+            <a:fillRect/>
+          </a:stretch>
+        </p:blipFill>
+        <p:spPr>
+          <a:xfrm>
+            <a:off x="8090316" y="5575867"/>
+            <a:ext cx="5420481" cy="3248478"/>
+          </a:xfrm>
+          <a:prstGeom prst="rect">
+            <a:avLst/>
+          </a:prstGeom>
+        </p:spPr>
+      </p:pic>
     </p:spTree>
     <p:extLst>
       <p:ext uri="{BB962C8B-B14F-4D97-AF65-F5344CB8AC3E}">
         <p14:creationId xmlns:p14="http://schemas.microsoft.com/office/powerpoint/2010/main" val="786876301"/>
+      </p:ext>
+    </p:extLst>
+  </p:cSld>
+  <p:clrMapOvr>
+    <a:masterClrMapping/>
+  </p:clrMapOvr>
+</p:sld>
+</file>
+
+<file path=ppt/slides/slide2.xml><?xml version="1.0" encoding="utf-8"?>
+<p:sld xmlns:a="http://schemas.openxmlformats.org/drawingml/2006/main" xmlns:r="http://schemas.openxmlformats.org/officeDocument/2006/relationships" xmlns:p="http://schemas.openxmlformats.org/presentationml/2006/main">
+  <p:cSld>
+    <p:spTree>
+      <p:nvGrpSpPr>
+        <p:cNvPr id="1" name=""/>
+        <p:cNvGrpSpPr/>
+        <p:nvPr/>
+      </p:nvGrpSpPr>
+      <p:grpSpPr>
+        <a:xfrm>
+          <a:off x="0" y="0"/>
+          <a:ext cx="0" cy="0"/>
+          <a:chOff x="0" y="0"/>
+          <a:chExt cx="0" cy="0"/>
+        </a:xfrm>
+      </p:grpSpPr>
+      <p:pic>
+        <p:nvPicPr>
+          <p:cNvPr id="3" name="Picture 2" descr="The diagram illustrates a linear relationship between stimulus (in mA) and current (in mA), with values ranging from -2 to 10 mA, plotted over time (in milliseconds).&#10;&#10;AI-generated content may be incorrect.">
+            <a:extLst>
+              <a:ext uri="{FF2B5EF4-FFF2-40B4-BE49-F238E27FC236}">
+                <a16:creationId xmlns:a16="http://schemas.microsoft.com/office/drawing/2014/main" id="{5BD372D0-3DC2-A23C-212D-3715BD05EA5C}"/>
+              </a:ext>
+            </a:extLst>
+          </p:cNvPr>
+          <p:cNvPicPr>
+            <a:picLocks noChangeAspect="1"/>
+          </p:cNvPicPr>
+          <p:nvPr/>
+        </p:nvPicPr>
+        <p:blipFill>
+          <a:blip r:embed="rId2"/>
+          <a:stretch>
+            <a:fillRect/>
+          </a:stretch>
+        </p:blipFill>
+        <p:spPr>
+          <a:xfrm>
+            <a:off x="8090316" y="5552051"/>
+            <a:ext cx="5420481" cy="3296110"/>
+          </a:xfrm>
+          <a:prstGeom prst="rect">
+            <a:avLst/>
+          </a:prstGeom>
+        </p:spPr>
+      </p:pic>
+    </p:spTree>
+    <p:extLst>
+      <p:ext uri="{BB962C8B-B14F-4D97-AF65-F5344CB8AC3E}">
+        <p14:creationId xmlns:p14="http://schemas.microsoft.com/office/powerpoint/2010/main" val="484695441"/>
+      </p:ext>
+    </p:extLst>
+  </p:cSld>
+  <p:clrMapOvr>
+    <a:masterClrMapping/>
+  </p:clrMapOvr>
+</p:sld>
+</file>
+
+<file path=ppt/slides/slide3.xml><?xml version="1.0" encoding="utf-8"?>
+<p:sld xmlns:a="http://schemas.openxmlformats.org/drawingml/2006/main" xmlns:r="http://schemas.openxmlformats.org/officeDocument/2006/relationships" xmlns:p="http://schemas.openxmlformats.org/presentationml/2006/main">
+  <p:cSld>
+    <p:spTree>
+      <p:nvGrpSpPr>
+        <p:cNvPr id="1" name=""/>
+        <p:cNvGrpSpPr/>
+        <p:nvPr/>
+      </p:nvGrpSpPr>
+      <p:grpSpPr>
+        <a:xfrm>
+          <a:off x="0" y="0"/>
+          <a:ext cx="0" cy="0"/>
+          <a:chOff x="0" y="0"/>
+          <a:chExt cx="0" cy="0"/>
+        </a:xfrm>
+      </p:grpSpPr>
+      <p:pic>
+        <p:nvPicPr>
+          <p:cNvPr id="3" name="Picture 2" descr="The diagram shows a current versus time graph, indicating a stimulus with peaks at 3 mA and -2 mA over a time span from 0 to 10 milliseconds.&#10;&#10;AI-generated content may be incorrect.">
+            <a:extLst>
+              <a:ext uri="{FF2B5EF4-FFF2-40B4-BE49-F238E27FC236}">
+                <a16:creationId xmlns:a16="http://schemas.microsoft.com/office/drawing/2014/main" id="{859EF9B1-E1F9-E398-3B24-FDAA54ED5A3E}"/>
+              </a:ext>
+            </a:extLst>
+          </p:cNvPr>
+          <p:cNvPicPr>
+            <a:picLocks noChangeAspect="1"/>
+          </p:cNvPicPr>
+          <p:nvPr/>
+        </p:nvPicPr>
+        <p:blipFill>
+          <a:blip r:embed="rId2"/>
+          <a:stretch>
+            <a:fillRect/>
+          </a:stretch>
+        </p:blipFill>
+        <p:spPr>
+          <a:xfrm>
+            <a:off x="8104605" y="5552051"/>
+            <a:ext cx="5391902" cy="3296110"/>
+          </a:xfrm>
+          <a:prstGeom prst="rect">
+            <a:avLst/>
+          </a:prstGeom>
+        </p:spPr>
+      </p:pic>
+    </p:spTree>
+    <p:extLst>
+      <p:ext uri="{BB962C8B-B14F-4D97-AF65-F5344CB8AC3E}">
+        <p14:creationId xmlns:p14="http://schemas.microsoft.com/office/powerpoint/2010/main" val="2235567967"/>
+      </p:ext>
+    </p:extLst>
+  </p:cSld>
+  <p:clrMapOvr>
+    <a:masterClrMapping/>
+  </p:clrMapOvr>
+</p:sld>
+</file>
+
+<file path=ppt/slides/slide4.xml><?xml version="1.0" encoding="utf-8"?>
+<p:sld xmlns:a="http://schemas.openxmlformats.org/drawingml/2006/main" xmlns:r="http://schemas.openxmlformats.org/officeDocument/2006/relationships" xmlns:p="http://schemas.openxmlformats.org/presentationml/2006/main">
+  <p:cSld>
+    <p:spTree>
+      <p:nvGrpSpPr>
+        <p:cNvPr id="1" name=""/>
+        <p:cNvGrpSpPr/>
+        <p:nvPr/>
+      </p:nvGrpSpPr>
+      <p:grpSpPr>
+        <a:xfrm>
+          <a:off x="0" y="0"/>
+          <a:ext cx="0" cy="0"/>
+          <a:chOff x="0" y="0"/>
+          <a:chExt cx="0" cy="0"/>
+        </a:xfrm>
+      </p:grpSpPr>
+      <p:pic>
+        <p:nvPicPr>
+          <p:cNvPr id="3" name="Picture 2" descr="The diagram depicts a linear relationship between stimulus (in milliamps) and current (in mA) over time (in milliseconds).&#10;&#10;AI-generated content may be incorrect.">
+            <a:extLst>
+              <a:ext uri="{FF2B5EF4-FFF2-40B4-BE49-F238E27FC236}">
+                <a16:creationId xmlns:a16="http://schemas.microsoft.com/office/drawing/2014/main" id="{4D0FEE4D-947E-A598-33A8-349AB56BC52C}"/>
+              </a:ext>
+            </a:extLst>
+          </p:cNvPr>
+          <p:cNvPicPr>
+            <a:picLocks noChangeAspect="1"/>
+          </p:cNvPicPr>
+          <p:nvPr/>
+        </p:nvPicPr>
+        <p:blipFill>
+          <a:blip r:embed="rId2"/>
+          <a:stretch>
+            <a:fillRect/>
+          </a:stretch>
+        </p:blipFill>
+        <p:spPr>
+          <a:xfrm>
+            <a:off x="8104605" y="5552051"/>
+            <a:ext cx="5391902" cy="3296110"/>
+          </a:xfrm>
+          <a:prstGeom prst="rect">
+            <a:avLst/>
+          </a:prstGeom>
+        </p:spPr>
+      </p:pic>
+    </p:spTree>
+    <p:extLst>
+      <p:ext uri="{BB962C8B-B14F-4D97-AF65-F5344CB8AC3E}">
+        <p14:creationId xmlns:p14="http://schemas.microsoft.com/office/powerpoint/2010/main" val="2987459977"/>
+      </p:ext>
+    </p:extLst>
+  </p:cSld>
+  <p:clrMapOvr>
+    <a:masterClrMapping/>
+  </p:clrMapOvr>
+</p:sld>
+</file>
+
+<file path=ppt/slides/slide5.xml><?xml version="1.0" encoding="utf-8"?>
+<p:sld xmlns:a="http://schemas.openxmlformats.org/drawingml/2006/main" xmlns:r="http://schemas.openxmlformats.org/officeDocument/2006/relationships" xmlns:p="http://schemas.openxmlformats.org/presentationml/2006/main">
+  <p:cSld>
+    <p:spTree>
+      <p:nvGrpSpPr>
+        <p:cNvPr id="1" name=""/>
+        <p:cNvGrpSpPr/>
+        <p:nvPr/>
+      </p:nvGrpSpPr>
+      <p:grpSpPr>
+        <a:xfrm>
+          <a:off x="0" y="0"/>
+          <a:ext cx="0" cy="0"/>
+          <a:chOff x="0" y="0"/>
+          <a:chExt cx="0" cy="0"/>
+        </a:xfrm>
+      </p:grpSpPr>
+      <p:pic>
+        <p:nvPicPr>
+          <p:cNvPr id="3" name="Picture 2" descr="The diagram depicts a waveform graph with a sinusoidal pattern, indicating a periodic stimulus current with a peak of 1 mA, oscillating over time in milliseconds.&#10;&#10;AI-generated content may be incorrect.">
+            <a:extLst>
+              <a:ext uri="{FF2B5EF4-FFF2-40B4-BE49-F238E27FC236}">
+                <a16:creationId xmlns:a16="http://schemas.microsoft.com/office/drawing/2014/main" id="{F8EF547F-8F33-CB0C-AEED-466D57BB2EE5}"/>
+              </a:ext>
+            </a:extLst>
+          </p:cNvPr>
+          <p:cNvPicPr>
+            <a:picLocks noChangeAspect="1"/>
+          </p:cNvPicPr>
+          <p:nvPr/>
+        </p:nvPicPr>
+        <p:blipFill>
+          <a:blip r:embed="rId2"/>
+          <a:stretch>
+            <a:fillRect/>
+          </a:stretch>
+        </p:blipFill>
+        <p:spPr>
+          <a:xfrm>
+            <a:off x="8137947" y="5537762"/>
+            <a:ext cx="5325218" cy="3324689"/>
+          </a:xfrm>
+          <a:prstGeom prst="rect">
+            <a:avLst/>
+          </a:prstGeom>
+        </p:spPr>
+      </p:pic>
+    </p:spTree>
+    <p:extLst>
+      <p:ext uri="{BB962C8B-B14F-4D97-AF65-F5344CB8AC3E}">
+        <p14:creationId xmlns:p14="http://schemas.microsoft.com/office/powerpoint/2010/main" val="1908271121"/>
+      </p:ext>
+    </p:extLst>
+  </p:cSld>
+  <p:clrMapOvr>
+    <a:masterClrMapping/>
+  </p:clrMapOvr>
+</p:sld>
+</file>
+
+<file path=ppt/slides/slide6.xml><?xml version="1.0" encoding="utf-8"?>
+<p:sld xmlns:a="http://schemas.openxmlformats.org/drawingml/2006/main" xmlns:r="http://schemas.openxmlformats.org/officeDocument/2006/relationships" xmlns:p="http://schemas.openxmlformats.org/presentationml/2006/main">
+  <p:cSld>
+    <p:spTree>
+      <p:nvGrpSpPr>
+        <p:cNvPr id="1" name=""/>
+        <p:cNvGrpSpPr/>
+        <p:nvPr/>
+      </p:nvGrpSpPr>
+      <p:grpSpPr>
+        <a:xfrm>
+          <a:off x="0" y="0"/>
+          <a:ext cx="0" cy="0"/>
+          <a:chOff x="0" y="0"/>
+          <a:chExt cx="0" cy="0"/>
+        </a:xfrm>
+      </p:grpSpPr>
+      <p:pic>
+        <p:nvPicPr>
+          <p:cNvPr id="3" name="Picture 2" descr="The diagram displays a current (mA) versus time (ms) graph with a linear increase in current over time.&#10;&#10;AI-generated content may be incorrect.">
+            <a:extLst>
+              <a:ext uri="{FF2B5EF4-FFF2-40B4-BE49-F238E27FC236}">
+                <a16:creationId xmlns:a16="http://schemas.microsoft.com/office/drawing/2014/main" id="{0AD835A8-81F5-C8C8-742E-A05DB44CBC3B}"/>
+              </a:ext>
+            </a:extLst>
+          </p:cNvPr>
+          <p:cNvPicPr>
+            <a:picLocks noChangeAspect="1"/>
+          </p:cNvPicPr>
+          <p:nvPr/>
+        </p:nvPicPr>
+        <p:blipFill>
+          <a:blip r:embed="rId2"/>
+          <a:stretch>
+            <a:fillRect/>
+          </a:stretch>
+        </p:blipFill>
+        <p:spPr>
+          <a:xfrm>
+            <a:off x="8076026" y="5556814"/>
+            <a:ext cx="5449060" cy="3286584"/>
+          </a:xfrm>
+          <a:prstGeom prst="rect">
+            <a:avLst/>
+          </a:prstGeom>
+        </p:spPr>
+      </p:pic>
+    </p:spTree>
+    <p:extLst>
+      <p:ext uri="{BB962C8B-B14F-4D97-AF65-F5344CB8AC3E}">
+        <p14:creationId xmlns:p14="http://schemas.microsoft.com/office/powerpoint/2010/main" val="3305667469"/>
+      </p:ext>
+    </p:extLst>
+  </p:cSld>
+  <p:clrMapOvr>
+    <a:masterClrMapping/>
+  </p:clrMapOvr>
+</p:sld>
+</file>
+
+<file path=ppt/slides/slide7.xml><?xml version="1.0" encoding="utf-8"?>
+<p:sld xmlns:a="http://schemas.openxmlformats.org/drawingml/2006/main" xmlns:r="http://schemas.openxmlformats.org/officeDocument/2006/relationships" xmlns:p="http://schemas.openxmlformats.org/presentationml/2006/main">
+  <p:cSld>
+    <p:spTree>
+      <p:nvGrpSpPr>
+        <p:cNvPr id="1" name=""/>
+        <p:cNvGrpSpPr/>
+        <p:nvPr/>
+      </p:nvGrpSpPr>
+      <p:grpSpPr>
+        <a:xfrm>
+          <a:off x="0" y="0"/>
+          <a:ext cx="0" cy="0"/>
+          <a:chOff x="0" y="0"/>
+          <a:chExt cx="0" cy="0"/>
+        </a:xfrm>
+      </p:grpSpPr>
+      <p:pic>
+        <p:nvPicPr>
+          <p:cNvPr id="3" name="Picture 2" descr="The diagram displays a graph of current (in milliamps) over time (in milliseconds), showing a current pulse that peaks at 4 mA and then returns to zero.&#10;&#10;AI-generated content may be incorrect.">
+            <a:extLst>
+              <a:ext uri="{FF2B5EF4-FFF2-40B4-BE49-F238E27FC236}">
+                <a16:creationId xmlns:a16="http://schemas.microsoft.com/office/drawing/2014/main" id="{0757394A-8EB6-1191-444E-623E90BFA6C5}"/>
+              </a:ext>
+            </a:extLst>
+          </p:cNvPr>
+          <p:cNvPicPr>
+            <a:picLocks noChangeAspect="1"/>
+          </p:cNvPicPr>
+          <p:nvPr/>
+        </p:nvPicPr>
+        <p:blipFill>
+          <a:blip r:embed="rId2"/>
+          <a:stretch>
+            <a:fillRect/>
+          </a:stretch>
+        </p:blipFill>
+        <p:spPr>
+          <a:xfrm>
+            <a:off x="8137947" y="5552051"/>
+            <a:ext cx="5325218" cy="3296110"/>
+          </a:xfrm>
+          <a:prstGeom prst="rect">
+            <a:avLst/>
+          </a:prstGeom>
+        </p:spPr>
+      </p:pic>
+    </p:spTree>
+    <p:extLst>
+      <p:ext uri="{BB962C8B-B14F-4D97-AF65-F5344CB8AC3E}">
+        <p14:creationId xmlns:p14="http://schemas.microsoft.com/office/powerpoint/2010/main" val="487148048"/>
+      </p:ext>
+    </p:extLst>
+  </p:cSld>
+  <p:clrMapOvr>
+    <a:masterClrMapping/>
+  </p:clrMapOvr>
+</p:sld>
+</file>
+
+<file path=ppt/slides/slide8.xml><?xml version="1.0" encoding="utf-8"?>
+<p:sld xmlns:a="http://schemas.openxmlformats.org/drawingml/2006/main" xmlns:r="http://schemas.openxmlformats.org/officeDocument/2006/relationships" xmlns:p="http://schemas.openxmlformats.org/presentationml/2006/main">
+  <p:cSld>
+    <p:spTree>
+      <p:nvGrpSpPr>
+        <p:cNvPr id="1" name=""/>
+        <p:cNvGrpSpPr/>
+        <p:nvPr/>
+      </p:nvGrpSpPr>
+      <p:grpSpPr>
+        <a:xfrm>
+          <a:off x="0" y="0"/>
+          <a:ext cx="0" cy="0"/>
+          <a:chOff x="0" y="0"/>
+          <a:chExt cx="0" cy="0"/>
+        </a:xfrm>
+      </p:grpSpPr>
+      <p:pic>
+        <p:nvPicPr>
+          <p:cNvPr id="3" name="Picture 2">
+            <a:extLst>
+              <a:ext uri="{FF2B5EF4-FFF2-40B4-BE49-F238E27FC236}">
+                <a16:creationId xmlns:a16="http://schemas.microsoft.com/office/drawing/2014/main" id="{F8ABB09D-29AE-0976-A839-DA7DDB575366}"/>
+              </a:ext>
+            </a:extLst>
+          </p:cNvPr>
+          <p:cNvPicPr>
+            <a:picLocks noChangeAspect="1"/>
+          </p:cNvPicPr>
+          <p:nvPr/>
+        </p:nvPicPr>
+        <p:blipFill>
+          <a:blip r:embed="rId2"/>
+          <a:stretch>
+            <a:fillRect/>
+          </a:stretch>
+        </p:blipFill>
+        <p:spPr>
+          <a:xfrm>
+            <a:off x="8037921" y="5556814"/>
+            <a:ext cx="5525271" cy="3286584"/>
+          </a:xfrm>
+          <a:prstGeom prst="rect">
+            <a:avLst/>
+          </a:prstGeom>
+        </p:spPr>
+      </p:pic>
+    </p:spTree>
+    <p:extLst>
+      <p:ext uri="{BB962C8B-B14F-4D97-AF65-F5344CB8AC3E}">
+        <p14:creationId xmlns:p14="http://schemas.microsoft.com/office/powerpoint/2010/main" val="1896785181"/>
       </p:ext>
     </p:extLst>
   </p:cSld>
@@ -4263,12 +4720,14 @@
 </file>
 
 <file path=customXml/item1.xml><?xml version="1.0" encoding="utf-8"?>
-<?mso-contentType ?>
-<FormTemplates xmlns="http://schemas.microsoft.com/sharepoint/v3/contenttype/forms">
-  <Display>DocumentLibraryForm</Display>
-  <Edit>DocumentLibraryForm</Edit>
-  <New>DocumentLibraryForm</New>
-</FormTemplates>
+<p:properties xmlns:p="http://schemas.microsoft.com/office/2006/metadata/properties" xmlns:xsi="http://www.w3.org/2001/XMLSchema-instance" xmlns:pc="http://schemas.microsoft.com/office/infopath/2007/PartnerControls">
+  <documentManagement>
+    <TaxCatchAll xmlns="6dfb7b4b-871d-4c24-9d42-16b14ecd044c" xsi:nil="true"/>
+    <lcf76f155ced4ddcb4097134ff3c332f xmlns="51c7d8ad-74c8-4833-8478-0d0a5cafce0c">
+      <Terms xmlns="http://schemas.microsoft.com/office/infopath/2007/PartnerControls"/>
+    </lcf76f155ced4ddcb4097134ff3c332f>
+  </documentManagement>
+</p:properties>
 </file>
 
 <file path=customXml/item2.xml><?xml version="1.0" encoding="utf-8"?>
@@ -4527,20 +4986,21 @@
 </file>
 
 <file path=customXml/item3.xml><?xml version="1.0" encoding="utf-8"?>
-<p:properties xmlns:p="http://schemas.microsoft.com/office/2006/metadata/properties" xmlns:xsi="http://www.w3.org/2001/XMLSchema-instance" xmlns:pc="http://schemas.microsoft.com/office/infopath/2007/PartnerControls">
-  <documentManagement>
-    <TaxCatchAll xmlns="6dfb7b4b-871d-4c24-9d42-16b14ecd044c" xsi:nil="true"/>
-    <lcf76f155ced4ddcb4097134ff3c332f xmlns="51c7d8ad-74c8-4833-8478-0d0a5cafce0c">
-      <Terms xmlns="http://schemas.microsoft.com/office/infopath/2007/PartnerControls"/>
-    </lcf76f155ced4ddcb4097134ff3c332f>
-  </documentManagement>
-</p:properties>
+<?mso-contentType ?>
+<FormTemplates xmlns="http://schemas.microsoft.com/sharepoint/v3/contenttype/forms">
+  <Display>DocumentLibraryForm</Display>
+  <Edit>DocumentLibraryForm</Edit>
+  <New>DocumentLibraryForm</New>
+</FormTemplates>
 </file>
 
 <file path=customXml/itemProps1.xml><?xml version="1.0" encoding="utf-8"?>
-<ds:datastoreItem xmlns:ds="http://schemas.openxmlformats.org/officeDocument/2006/customXml" ds:itemID="{EF875D47-8106-485E-98E0-D60C6A98DA6A}">
+<ds:datastoreItem xmlns:ds="http://schemas.openxmlformats.org/officeDocument/2006/customXml" ds:itemID="{2EF670CE-B0AA-4D52-AFC6-AA4BF7D46EEA}">
   <ds:schemaRefs>
-    <ds:schemaRef ds:uri="http://schemas.microsoft.com/sharepoint/v3/contenttype/forms"/>
+    <ds:schemaRef ds:uri="http://schemas.microsoft.com/office/2006/metadata/properties"/>
+    <ds:schemaRef ds:uri="http://schemas.microsoft.com/office/infopath/2007/PartnerControls"/>
+    <ds:schemaRef ds:uri="6dfb7b4b-871d-4c24-9d42-16b14ecd044c"/>
+    <ds:schemaRef ds:uri="51c7d8ad-74c8-4833-8478-0d0a5cafce0c"/>
   </ds:schemaRefs>
 </ds:datastoreItem>
 </file>
@@ -4565,12 +5025,9 @@
 </file>
 
 <file path=customXml/itemProps3.xml><?xml version="1.0" encoding="utf-8"?>
-<ds:datastoreItem xmlns:ds="http://schemas.openxmlformats.org/officeDocument/2006/customXml" ds:itemID="{2EF670CE-B0AA-4D52-AFC6-AA4BF7D46EEA}">
+<ds:datastoreItem xmlns:ds="http://schemas.openxmlformats.org/officeDocument/2006/customXml" ds:itemID="{EF875D47-8106-485E-98E0-D60C6A98DA6A}">
   <ds:schemaRefs>
-    <ds:schemaRef ds:uri="http://schemas.microsoft.com/office/2006/metadata/properties"/>
-    <ds:schemaRef ds:uri="http://schemas.microsoft.com/office/infopath/2007/PartnerControls"/>
-    <ds:schemaRef ds:uri="6dfb7b4b-871d-4c24-9d42-16b14ecd044c"/>
-    <ds:schemaRef ds:uri="51c7d8ad-74c8-4833-8478-0d0a5cafce0c"/>
+    <ds:schemaRef ds:uri="http://schemas.microsoft.com/sharepoint/v3/contenttype/forms"/>
   </ds:schemaRefs>
 </ds:datastoreItem>
 </file>
--- a/assets/images/Experitments_Procedures.pptx
+++ b/assets/images/Experitments_Procedures.pptx
@@ -4048,7 +4048,7 @@
       </p:grpSpPr>
       <p:pic>
         <p:nvPicPr>
-          <p:cNvPr id="3" name="Picture 2">
+          <p:cNvPr id="3" name="Picture 2" descr="The image appears to be a graph or chart displaying a current (in milliamperes, mA) over time (in milliseconds, ms), with data points at intervals of 5 ms from 0 to 65 ms.&#10;&#10;AI-generated content may be incorrect.">
             <a:extLst>
               <a:ext uri="{FF2B5EF4-FFF2-40B4-BE49-F238E27FC236}">
                 <a16:creationId xmlns:a16="http://schemas.microsoft.com/office/drawing/2014/main" id="{F8ABB09D-29AE-0976-A839-DA7DDB575366}"/>
@@ -4997,10 +4997,16 @@
 <file path=customXml/itemProps1.xml><?xml version="1.0" encoding="utf-8"?>
 <ds:datastoreItem xmlns:ds="http://schemas.openxmlformats.org/officeDocument/2006/customXml" ds:itemID="{2EF670CE-B0AA-4D52-AFC6-AA4BF7D46EEA}">
   <ds:schemaRefs>
+    <ds:schemaRef ds:uri="http://schemas.microsoft.com/office/infopath/2007/PartnerControls"/>
+    <ds:schemaRef ds:uri="http://purl.org/dc/terms/"/>
+    <ds:schemaRef ds:uri="http://purl.org/dc/dcmitype/"/>
+    <ds:schemaRef ds:uri="51c7d8ad-74c8-4833-8478-0d0a5cafce0c"/>
+    <ds:schemaRef ds:uri="http://purl.org/dc/elements/1.1/"/>
     <ds:schemaRef ds:uri="http://schemas.microsoft.com/office/2006/metadata/properties"/>
-    <ds:schemaRef ds:uri="http://schemas.microsoft.com/office/infopath/2007/PartnerControls"/>
+    <ds:schemaRef ds:uri="http://schemas.openxmlformats.org/package/2006/metadata/core-properties"/>
+    <ds:schemaRef ds:uri="http://schemas.microsoft.com/office/2006/documentManagement/types"/>
     <ds:schemaRef ds:uri="6dfb7b4b-871d-4c24-9d42-16b14ecd044c"/>
-    <ds:schemaRef ds:uri="51c7d8ad-74c8-4833-8478-0d0a5cafce0c"/>
+    <ds:schemaRef ds:uri="http://www.w3.org/XML/1998/namespace"/>
   </ds:schemaRefs>
 </ds:datastoreItem>
 </file>
